--- a/PromptGenerator_Overview.pptx
+++ b/PromptGenerator_Overview.pptx
@@ -17339,7 +17339,7 @@
                 </a:solidFill>
                 <a:latin typeface="Calibri"/>
               </a:rPr>
-              <a:t>PK Positive &amp; Negative prompts feed the image engine directly · everything else guides the rewrite</a:t>
+              <a:t>Positive &amp; Negative prompts feed the image engine directly — everything else guides the rewrite.</a:t>
             </a:r>
           </a:p>
         </p:txBody>

--- a/PromptGenerator_Overview.pptx
+++ b/PromptGenerator_Overview.pptx
@@ -10831,17 +10831,65 @@
       </p:sp>
       <p:sp>
         <p:nvSpPr>
-          <p:cNvPr id="12" name="Rectangle 11"/>
+          <p:cNvPr id="12" name="Rounded Rectangle 11"/>
           <p:cNvSpPr/>
           <p:nvPr/>
         </p:nvSpPr>
         <p:spPr>
           <a:xfrm>
-            <a:off x="3282696" y="2944368"/>
-            <a:ext cx="164592" cy="201168"/>
-          </a:xfrm>
-          <a:prstGeom prst="rect">
-            <a:avLst/>
+            <a:off x="3438144" y="2331720"/>
+            <a:ext cx="2651760" cy="1417320"/>
+          </a:xfrm>
+          <a:prstGeom prst="roundRect">
+            <a:avLst>
+              <a:gd name="adj" fmla="val 6000"/>
+            </a:avLst>
+          </a:prstGeom>
+          <a:solidFill>
+            <a:srgbClr val="FFFFFF"/>
+          </a:solidFill>
+          <a:ln>
+            <a:noFill/>
+          </a:ln>
+          <a:effectLst/>
+        </p:spPr>
+        <p:style>
+          <a:lnRef idx="1">
+            <a:schemeClr val="accent1"/>
+          </a:lnRef>
+          <a:fillRef idx="3">
+            <a:schemeClr val="accent1"/>
+          </a:fillRef>
+          <a:effectRef idx="2">
+            <a:schemeClr val="accent1"/>
+          </a:effectRef>
+          <a:fontRef idx="minor">
+            <a:schemeClr val="lt1"/>
+          </a:fontRef>
+        </p:style>
+        <p:txBody>
+          <a:bodyPr rtlCol="0" anchor="ctr"/>
+          <a:lstStyle/>
+          <a:p>
+            <a:pPr algn="ctr"/>
+          </a:p>
+        </p:txBody>
+      </p:sp>
+      <p:sp>
+        <p:nvSpPr>
+          <p:cNvPr id="13" name="Rounded Rectangle 12"/>
+          <p:cNvSpPr/>
+          <p:nvPr/>
+        </p:nvSpPr>
+        <p:spPr>
+          <a:xfrm>
+            <a:off x="3694176" y="2569463"/>
+            <a:ext cx="457200" cy="457200"/>
+          </a:xfrm>
+          <a:prstGeom prst="roundRect">
+            <a:avLst>
+              <a:gd name="adj" fmla="val 20000"/>
+            </a:avLst>
           </a:prstGeom>
           <a:solidFill>
             <a:srgbClr val="16175A"/>
@@ -10875,13 +10923,130 @@
       </p:sp>
       <p:sp>
         <p:nvSpPr>
-          <p:cNvPr id="13" name="Rounded Rectangle 12"/>
+          <p:cNvPr id="14" name="TextBox 13"/>
+          <p:cNvSpPr txBox="1"/>
+          <p:nvPr/>
+        </p:nvSpPr>
+        <p:spPr>
+          <a:xfrm>
+            <a:off x="3694176" y="2569463"/>
+            <a:ext cx="457200" cy="457200"/>
+          </a:xfrm>
+          <a:prstGeom prst="rect">
+            <a:avLst/>
+          </a:prstGeom>
+          <a:noFill/>
+        </p:spPr>
+        <p:txBody>
+          <a:bodyPr wrap="square" lIns="0" rIns="0" tIns="0" bIns="0" anchor="ctr">
+            <a:spAutoFit/>
+          </a:bodyPr>
+          <a:lstStyle/>
+          <a:p>
+            <a:pPr algn="ctr">
+              <a:lnSpc>
+                <a:spcPct val="100000"/>
+              </a:lnSpc>
+            </a:pPr>
+            <a:r>
+              <a:rPr sz="1600" b="1">
+                <a:solidFill>
+                  <a:srgbClr val="FFFFFF"/>
+                </a:solidFill>
+                <a:latin typeface="Calibri"/>
+              </a:rPr>
+              <a:t>2</a:t>
+            </a:r>
+          </a:p>
+        </p:txBody>
+      </p:sp>
+      <p:sp>
+        <p:nvSpPr>
+          <p:cNvPr id="15" name="TextBox 14"/>
+          <p:cNvSpPr txBox="1"/>
+          <p:nvPr/>
+        </p:nvSpPr>
+        <p:spPr>
+          <a:xfrm>
+            <a:off x="3694176" y="3136391"/>
+            <a:ext cx="2194560" cy="274320"/>
+          </a:xfrm>
+          <a:prstGeom prst="rect">
+            <a:avLst/>
+          </a:prstGeom>
+          <a:noFill/>
+        </p:spPr>
+        <p:txBody>
+          <a:bodyPr wrap="square" lIns="0" rIns="0" tIns="0" bIns="0" anchor="t">
+            <a:spAutoFit/>
+          </a:bodyPr>
+          <a:lstStyle/>
+          <a:p>
+            <a:pPr algn="l">
+              <a:lnSpc>
+                <a:spcPct val="100000"/>
+              </a:lnSpc>
+            </a:pPr>
+            <a:r>
+              <a:rPr sz="1300" b="1">
+                <a:solidFill>
+                  <a:srgbClr val="1B2A33"/>
+                </a:solidFill>
+                <a:latin typeface="Calibri"/>
+              </a:rPr>
+              <a:t>Pick a reference</a:t>
+            </a:r>
+          </a:p>
+        </p:txBody>
+      </p:sp>
+      <p:sp>
+        <p:nvSpPr>
+          <p:cNvPr id="16" name="TextBox 15"/>
+          <p:cNvSpPr txBox="1"/>
+          <p:nvPr/>
+        </p:nvSpPr>
+        <p:spPr>
+          <a:xfrm>
+            <a:off x="3694176" y="3410711"/>
+            <a:ext cx="2194560" cy="320040"/>
+          </a:xfrm>
+          <a:prstGeom prst="rect">
+            <a:avLst/>
+          </a:prstGeom>
+          <a:noFill/>
+        </p:spPr>
+        <p:txBody>
+          <a:bodyPr wrap="square" lIns="0" rIns="0" tIns="0" bIns="0" anchor="t">
+            <a:spAutoFit/>
+          </a:bodyPr>
+          <a:lstStyle/>
+          <a:p>
+            <a:pPr algn="l">
+              <a:lnSpc>
+                <a:spcPct val="100000"/>
+              </a:lnSpc>
+            </a:pPr>
+            <a:r>
+              <a:rPr sz="930" b="0">
+                <a:solidFill>
+                  <a:srgbClr val="5B637A"/>
+                </a:solidFill>
+                <a:latin typeface="Calibri"/>
+              </a:rPr>
+              <a:t>Load a template image you like</a:t>
+            </a:r>
+          </a:p>
+        </p:txBody>
+      </p:sp>
+      <p:sp>
+        <p:nvSpPr>
+          <p:cNvPr id="17" name="Rounded Rectangle 16"/>
           <p:cNvSpPr/>
           <p:nvPr/>
         </p:nvSpPr>
         <p:spPr>
           <a:xfrm>
-            <a:off x="3438144" y="2331720"/>
+            <a:off x="6236208" y="2331720"/>
             <a:ext cx="2651760" cy="1417320"/>
           </a:xfrm>
           <a:prstGeom prst="roundRect">
@@ -10921,13 +11086,13 @@
       </p:sp>
       <p:sp>
         <p:nvSpPr>
-          <p:cNvPr id="14" name="Rounded Rectangle 13"/>
+          <p:cNvPr id="18" name="Rounded Rectangle 17"/>
           <p:cNvSpPr/>
           <p:nvPr/>
         </p:nvSpPr>
         <p:spPr>
           <a:xfrm>
-            <a:off x="3694176" y="2569463"/>
+            <a:off x="6492240" y="2569463"/>
             <a:ext cx="457200" cy="457200"/>
           </a:xfrm>
           <a:prstGeom prst="roundRect">
@@ -10967,13 +11132,13 @@
       </p:sp>
       <p:sp>
         <p:nvSpPr>
-          <p:cNvPr id="15" name="TextBox 14"/>
-          <p:cNvSpPr txBox="1"/>
-          <p:nvPr/>
-        </p:nvSpPr>
-        <p:spPr>
-          <a:xfrm>
-            <a:off x="3694176" y="2569463"/>
+          <p:cNvPr id="19" name="TextBox 18"/>
+          <p:cNvSpPr txBox="1"/>
+          <p:nvPr/>
+        </p:nvSpPr>
+        <p:spPr>
+          <a:xfrm>
+            <a:off x="6492240" y="2569463"/>
             <a:ext cx="457200" cy="457200"/>
           </a:xfrm>
           <a:prstGeom prst="rect">
@@ -10999,20 +11164,20 @@
                 </a:solidFill>
                 <a:latin typeface="Calibri"/>
               </a:rPr>
-              <a:t>2</a:t>
-            </a:r>
-          </a:p>
-        </p:txBody>
-      </p:sp>
-      <p:sp>
-        <p:nvSpPr>
-          <p:cNvPr id="16" name="TextBox 15"/>
-          <p:cNvSpPr txBox="1"/>
-          <p:nvPr/>
-        </p:nvSpPr>
-        <p:spPr>
-          <a:xfrm>
-            <a:off x="3694176" y="3136391"/>
+              <a:t>3</a:t>
+            </a:r>
+          </a:p>
+        </p:txBody>
+      </p:sp>
+      <p:sp>
+        <p:nvSpPr>
+          <p:cNvPr id="20" name="TextBox 19"/>
+          <p:cNvSpPr txBox="1"/>
+          <p:nvPr/>
+        </p:nvSpPr>
+        <p:spPr>
+          <a:xfrm>
+            <a:off x="6492240" y="3136391"/>
             <a:ext cx="2194560" cy="274320"/>
           </a:xfrm>
           <a:prstGeom prst="rect">
@@ -11038,20 +11203,20 @@
                 </a:solidFill>
                 <a:latin typeface="Calibri"/>
               </a:rPr>
-              <a:t>Pick a reference</a:t>
-            </a:r>
-          </a:p>
-        </p:txBody>
-      </p:sp>
-      <p:sp>
-        <p:nvSpPr>
-          <p:cNvPr id="17" name="TextBox 16"/>
-          <p:cNvSpPr txBox="1"/>
-          <p:nvPr/>
-        </p:nvSpPr>
-        <p:spPr>
-          <a:xfrm>
-            <a:off x="3694176" y="3410711"/>
+              <a:t>See its recipe</a:t>
+            </a:r>
+          </a:p>
+        </p:txBody>
+      </p:sp>
+      <p:sp>
+        <p:nvSpPr>
+          <p:cNvPr id="21" name="TextBox 20"/>
+          <p:cNvSpPr txBox="1"/>
+          <p:nvPr/>
+        </p:nvSpPr>
+        <p:spPr>
+          <a:xfrm>
+            <a:off x="6492240" y="3410711"/>
             <a:ext cx="2194560" cy="320040"/>
           </a:xfrm>
           <a:prstGeom prst="rect">
@@ -11077,24 +11242,72 @@
                 </a:solidFill>
                 <a:latin typeface="Calibri"/>
               </a:rPr>
-              <a:t>Load a template image you like</a:t>
-            </a:r>
-          </a:p>
-        </p:txBody>
-      </p:sp>
-      <p:sp>
-        <p:nvSpPr>
-          <p:cNvPr id="18" name="Rectangle 17"/>
+              <a:t>App shows the reference's data</a:t>
+            </a:r>
+          </a:p>
+        </p:txBody>
+      </p:sp>
+      <p:sp>
+        <p:nvSpPr>
+          <p:cNvPr id="22" name="Rounded Rectangle 21"/>
           <p:cNvSpPr/>
           <p:nvPr/>
         </p:nvSpPr>
         <p:spPr>
           <a:xfrm>
-            <a:off x="6080760" y="2944368"/>
-            <a:ext cx="164592" cy="201168"/>
-          </a:xfrm>
-          <a:prstGeom prst="rect">
-            <a:avLst/>
+            <a:off x="9034272" y="2331720"/>
+            <a:ext cx="2651760" cy="1417320"/>
+          </a:xfrm>
+          <a:prstGeom prst="roundRect">
+            <a:avLst>
+              <a:gd name="adj" fmla="val 6000"/>
+            </a:avLst>
+          </a:prstGeom>
+          <a:solidFill>
+            <a:srgbClr val="FFFFFF"/>
+          </a:solidFill>
+          <a:ln>
+            <a:noFill/>
+          </a:ln>
+          <a:effectLst/>
+        </p:spPr>
+        <p:style>
+          <a:lnRef idx="1">
+            <a:schemeClr val="accent1"/>
+          </a:lnRef>
+          <a:fillRef idx="3">
+            <a:schemeClr val="accent1"/>
+          </a:fillRef>
+          <a:effectRef idx="2">
+            <a:schemeClr val="accent1"/>
+          </a:effectRef>
+          <a:fontRef idx="minor">
+            <a:schemeClr val="lt1"/>
+          </a:fontRef>
+        </p:style>
+        <p:txBody>
+          <a:bodyPr rtlCol="0" anchor="ctr"/>
+          <a:lstStyle/>
+          <a:p>
+            <a:pPr algn="ctr"/>
+          </a:p>
+        </p:txBody>
+      </p:sp>
+      <p:sp>
+        <p:nvSpPr>
+          <p:cNvPr id="23" name="Rounded Rectangle 22"/>
+          <p:cNvSpPr/>
+          <p:nvPr/>
+        </p:nvSpPr>
+        <p:spPr>
+          <a:xfrm>
+            <a:off x="9290303" y="2569463"/>
+            <a:ext cx="457200" cy="457200"/>
+          </a:xfrm>
+          <a:prstGeom prst="roundRect">
+            <a:avLst>
+              <a:gd name="adj" fmla="val 20000"/>
+            </a:avLst>
           </a:prstGeom>
           <a:solidFill>
             <a:srgbClr val="16175A"/>
@@ -11128,13 +11341,130 @@
       </p:sp>
       <p:sp>
         <p:nvSpPr>
-          <p:cNvPr id="19" name="Rounded Rectangle 18"/>
+          <p:cNvPr id="24" name="TextBox 23"/>
+          <p:cNvSpPr txBox="1"/>
+          <p:nvPr/>
+        </p:nvSpPr>
+        <p:spPr>
+          <a:xfrm>
+            <a:off x="9290303" y="2569463"/>
+            <a:ext cx="457200" cy="457200"/>
+          </a:xfrm>
+          <a:prstGeom prst="rect">
+            <a:avLst/>
+          </a:prstGeom>
+          <a:noFill/>
+        </p:spPr>
+        <p:txBody>
+          <a:bodyPr wrap="square" lIns="0" rIns="0" tIns="0" bIns="0" anchor="ctr">
+            <a:spAutoFit/>
+          </a:bodyPr>
+          <a:lstStyle/>
+          <a:p>
+            <a:pPr algn="ctr">
+              <a:lnSpc>
+                <a:spcPct val="100000"/>
+              </a:lnSpc>
+            </a:pPr>
+            <a:r>
+              <a:rPr sz="1600" b="1">
+                <a:solidFill>
+                  <a:srgbClr val="FFFFFF"/>
+                </a:solidFill>
+                <a:latin typeface="Calibri"/>
+              </a:rPr>
+              <a:t>4</a:t>
+            </a:r>
+          </a:p>
+        </p:txBody>
+      </p:sp>
+      <p:sp>
+        <p:nvSpPr>
+          <p:cNvPr id="25" name="TextBox 24"/>
+          <p:cNvSpPr txBox="1"/>
+          <p:nvPr/>
+        </p:nvSpPr>
+        <p:spPr>
+          <a:xfrm>
+            <a:off x="9290303" y="3136391"/>
+            <a:ext cx="2194560" cy="274320"/>
+          </a:xfrm>
+          <a:prstGeom prst="rect">
+            <a:avLst/>
+          </a:prstGeom>
+          <a:noFill/>
+        </p:spPr>
+        <p:txBody>
+          <a:bodyPr wrap="square" lIns="0" rIns="0" tIns="0" bIns="0" anchor="t">
+            <a:spAutoFit/>
+          </a:bodyPr>
+          <a:lstStyle/>
+          <a:p>
+            <a:pPr algn="l">
+              <a:lnSpc>
+                <a:spcPct val="100000"/>
+              </a:lnSpc>
+            </a:pPr>
+            <a:r>
+              <a:rPr sz="1300" b="1">
+                <a:solidFill>
+                  <a:srgbClr val="1B2A33"/>
+                </a:solidFill>
+                <a:latin typeface="Calibri"/>
+              </a:rPr>
+              <a:t>Adjust settings</a:t>
+            </a:r>
+          </a:p>
+        </p:txBody>
+      </p:sp>
+      <p:sp>
+        <p:nvSpPr>
+          <p:cNvPr id="26" name="TextBox 25"/>
+          <p:cNvSpPr txBox="1"/>
+          <p:nvPr/>
+        </p:nvSpPr>
+        <p:spPr>
+          <a:xfrm>
+            <a:off x="9290303" y="3410711"/>
+            <a:ext cx="2194560" cy="320040"/>
+          </a:xfrm>
+          <a:prstGeom prst="rect">
+            <a:avLst/>
+          </a:prstGeom>
+          <a:noFill/>
+        </p:spPr>
+        <p:txBody>
+          <a:bodyPr wrap="square" lIns="0" rIns="0" tIns="0" bIns="0" anchor="t">
+            <a:spAutoFit/>
+          </a:bodyPr>
+          <a:lstStyle/>
+          <a:p>
+            <a:pPr algn="l">
+              <a:lnSpc>
+                <a:spcPct val="100000"/>
+              </a:lnSpc>
+            </a:pPr>
+            <a:r>
+              <a:rPr sz="930" b="0">
+                <a:solidFill>
+                  <a:srgbClr val="5B637A"/>
+                </a:solidFill>
+                <a:latin typeface="Calibri"/>
+              </a:rPr>
+              <a:t>Position, ratio, theme, description</a:t>
+            </a:r>
+          </a:p>
+        </p:txBody>
+      </p:sp>
+      <p:sp>
+        <p:nvSpPr>
+          <p:cNvPr id="27" name="Rounded Rectangle 26"/>
           <p:cNvSpPr/>
           <p:nvPr/>
         </p:nvSpPr>
         <p:spPr>
           <a:xfrm>
-            <a:off x="6236208" y="2331720"/>
+            <a:off x="2039112" y="4023360"/>
             <a:ext cx="2651760" cy="1417320"/>
           </a:xfrm>
           <a:prstGeom prst="roundRect">
@@ -11174,13 +11504,13 @@
       </p:sp>
       <p:sp>
         <p:nvSpPr>
-          <p:cNvPr id="20" name="Rounded Rectangle 19"/>
+          <p:cNvPr id="28" name="Rounded Rectangle 27"/>
           <p:cNvSpPr/>
           <p:nvPr/>
         </p:nvSpPr>
         <p:spPr>
           <a:xfrm>
-            <a:off x="6492240" y="2569463"/>
+            <a:off x="2295144" y="4261104"/>
             <a:ext cx="457200" cy="457200"/>
           </a:xfrm>
           <a:prstGeom prst="roundRect">
@@ -11220,13 +11550,13 @@
       </p:sp>
       <p:sp>
         <p:nvSpPr>
-          <p:cNvPr id="21" name="TextBox 20"/>
-          <p:cNvSpPr txBox="1"/>
-          <p:nvPr/>
-        </p:nvSpPr>
-        <p:spPr>
-          <a:xfrm>
-            <a:off x="6492240" y="2569463"/>
+          <p:cNvPr id="29" name="TextBox 28"/>
+          <p:cNvSpPr txBox="1"/>
+          <p:nvPr/>
+        </p:nvSpPr>
+        <p:spPr>
+          <a:xfrm>
+            <a:off x="2295144" y="4261104"/>
             <a:ext cx="457200" cy="457200"/>
           </a:xfrm>
           <a:prstGeom prst="rect">
@@ -11252,20 +11582,20 @@
                 </a:solidFill>
                 <a:latin typeface="Calibri"/>
               </a:rPr>
-              <a:t>3</a:t>
-            </a:r>
-          </a:p>
-        </p:txBody>
-      </p:sp>
-      <p:sp>
-        <p:nvSpPr>
-          <p:cNvPr id="22" name="TextBox 21"/>
-          <p:cNvSpPr txBox="1"/>
-          <p:nvPr/>
-        </p:nvSpPr>
-        <p:spPr>
-          <a:xfrm>
-            <a:off x="6492240" y="3136391"/>
+              <a:t>5</a:t>
+            </a:r>
+          </a:p>
+        </p:txBody>
+      </p:sp>
+      <p:sp>
+        <p:nvSpPr>
+          <p:cNvPr id="30" name="TextBox 29"/>
+          <p:cNvSpPr txBox="1"/>
+          <p:nvPr/>
+        </p:nvSpPr>
+        <p:spPr>
+          <a:xfrm>
+            <a:off x="2295144" y="4828032"/>
             <a:ext cx="2194560" cy="274320"/>
           </a:xfrm>
           <a:prstGeom prst="rect">
@@ -11291,20 +11621,20 @@
                 </a:solidFill>
                 <a:latin typeface="Calibri"/>
               </a:rPr>
-              <a:t>See its recipe</a:t>
-            </a:r>
-          </a:p>
-        </p:txBody>
-      </p:sp>
-      <p:sp>
-        <p:nvSpPr>
-          <p:cNvPr id="23" name="TextBox 22"/>
-          <p:cNvSpPr txBox="1"/>
-          <p:nvPr/>
-        </p:nvSpPr>
-        <p:spPr>
-          <a:xfrm>
-            <a:off x="6492240" y="3410711"/>
+              <a:t>Regenerate</a:t>
+            </a:r>
+          </a:p>
+        </p:txBody>
+      </p:sp>
+      <p:sp>
+        <p:nvSpPr>
+          <p:cNvPr id="31" name="TextBox 30"/>
+          <p:cNvSpPr txBox="1"/>
+          <p:nvPr/>
+        </p:nvSpPr>
+        <p:spPr>
+          <a:xfrm>
+            <a:off x="2295144" y="5102352"/>
             <a:ext cx="2194560" cy="320040"/>
           </a:xfrm>
           <a:prstGeom prst="rect">
@@ -11330,24 +11660,72 @@
                 </a:solidFill>
                 <a:latin typeface="Calibri"/>
               </a:rPr>
-              <a:t>App shows the reference's data</a:t>
-            </a:r>
-          </a:p>
-        </p:txBody>
-      </p:sp>
-      <p:sp>
-        <p:nvSpPr>
-          <p:cNvPr id="24" name="Rectangle 23"/>
+              <a:t>OpenAI writes a fresh on-brand prompt</a:t>
+            </a:r>
+          </a:p>
+        </p:txBody>
+      </p:sp>
+      <p:sp>
+        <p:nvSpPr>
+          <p:cNvPr id="32" name="Rounded Rectangle 31"/>
           <p:cNvSpPr/>
           <p:nvPr/>
         </p:nvSpPr>
         <p:spPr>
           <a:xfrm>
-            <a:off x="8878824" y="2944368"/>
-            <a:ext cx="164592" cy="201168"/>
-          </a:xfrm>
-          <a:prstGeom prst="rect">
-            <a:avLst/>
+            <a:off x="4837176" y="4023360"/>
+            <a:ext cx="2651760" cy="1417320"/>
+          </a:xfrm>
+          <a:prstGeom prst="roundRect">
+            <a:avLst>
+              <a:gd name="adj" fmla="val 6000"/>
+            </a:avLst>
+          </a:prstGeom>
+          <a:solidFill>
+            <a:srgbClr val="FFFFFF"/>
+          </a:solidFill>
+          <a:ln>
+            <a:noFill/>
+          </a:ln>
+          <a:effectLst/>
+        </p:spPr>
+        <p:style>
+          <a:lnRef idx="1">
+            <a:schemeClr val="accent1"/>
+          </a:lnRef>
+          <a:fillRef idx="3">
+            <a:schemeClr val="accent1"/>
+          </a:fillRef>
+          <a:effectRef idx="2">
+            <a:schemeClr val="accent1"/>
+          </a:effectRef>
+          <a:fontRef idx="minor">
+            <a:schemeClr val="lt1"/>
+          </a:fontRef>
+        </p:style>
+        <p:txBody>
+          <a:bodyPr rtlCol="0" anchor="ctr"/>
+          <a:lstStyle/>
+          <a:p>
+            <a:pPr algn="ctr"/>
+          </a:p>
+        </p:txBody>
+      </p:sp>
+      <p:sp>
+        <p:nvSpPr>
+          <p:cNvPr id="33" name="Rounded Rectangle 32"/>
+          <p:cNvSpPr/>
+          <p:nvPr/>
+        </p:nvSpPr>
+        <p:spPr>
+          <a:xfrm>
+            <a:off x="5093208" y="4261104"/>
+            <a:ext cx="457200" cy="457200"/>
+          </a:xfrm>
+          <a:prstGeom prst="roundRect">
+            <a:avLst>
+              <a:gd name="adj" fmla="val 20000"/>
+            </a:avLst>
           </a:prstGeom>
           <a:solidFill>
             <a:srgbClr val="16175A"/>
@@ -11381,13 +11759,130 @@
       </p:sp>
       <p:sp>
         <p:nvSpPr>
-          <p:cNvPr id="25" name="Rounded Rectangle 24"/>
+          <p:cNvPr id="34" name="TextBox 33"/>
+          <p:cNvSpPr txBox="1"/>
+          <p:nvPr/>
+        </p:nvSpPr>
+        <p:spPr>
+          <a:xfrm>
+            <a:off x="5093208" y="4261104"/>
+            <a:ext cx="457200" cy="457200"/>
+          </a:xfrm>
+          <a:prstGeom prst="rect">
+            <a:avLst/>
+          </a:prstGeom>
+          <a:noFill/>
+        </p:spPr>
+        <p:txBody>
+          <a:bodyPr wrap="square" lIns="0" rIns="0" tIns="0" bIns="0" anchor="ctr">
+            <a:spAutoFit/>
+          </a:bodyPr>
+          <a:lstStyle/>
+          <a:p>
+            <a:pPr algn="ctr">
+              <a:lnSpc>
+                <a:spcPct val="100000"/>
+              </a:lnSpc>
+            </a:pPr>
+            <a:r>
+              <a:rPr sz="1600" b="1">
+                <a:solidFill>
+                  <a:srgbClr val="FFFFFF"/>
+                </a:solidFill>
+                <a:latin typeface="Calibri"/>
+              </a:rPr>
+              <a:t>6</a:t>
+            </a:r>
+          </a:p>
+        </p:txBody>
+      </p:sp>
+      <p:sp>
+        <p:nvSpPr>
+          <p:cNvPr id="35" name="TextBox 34"/>
+          <p:cNvSpPr txBox="1"/>
+          <p:nvPr/>
+        </p:nvSpPr>
+        <p:spPr>
+          <a:xfrm>
+            <a:off x="5093208" y="4828032"/>
+            <a:ext cx="2194560" cy="274320"/>
+          </a:xfrm>
+          <a:prstGeom prst="rect">
+            <a:avLst/>
+          </a:prstGeom>
+          <a:noFill/>
+        </p:spPr>
+        <p:txBody>
+          <a:bodyPr wrap="square" lIns="0" rIns="0" tIns="0" bIns="0" anchor="t">
+            <a:spAutoFit/>
+          </a:bodyPr>
+          <a:lstStyle/>
+          <a:p>
+            <a:pPr algn="l">
+              <a:lnSpc>
+                <a:spcPct val="100000"/>
+              </a:lnSpc>
+            </a:pPr>
+            <a:r>
+              <a:rPr sz="1300" b="1">
+                <a:solidFill>
+                  <a:srgbClr val="1B2A33"/>
+                </a:solidFill>
+                <a:latin typeface="Calibri"/>
+              </a:rPr>
+              <a:t>Generate images</a:t>
+            </a:r>
+          </a:p>
+        </p:txBody>
+      </p:sp>
+      <p:sp>
+        <p:nvSpPr>
+          <p:cNvPr id="36" name="TextBox 35"/>
+          <p:cNvSpPr txBox="1"/>
+          <p:nvPr/>
+        </p:nvSpPr>
+        <p:spPr>
+          <a:xfrm>
+            <a:off x="5093208" y="5102352"/>
+            <a:ext cx="2194560" cy="320040"/>
+          </a:xfrm>
+          <a:prstGeom prst="rect">
+            <a:avLst/>
+          </a:prstGeom>
+          <a:noFill/>
+        </p:spPr>
+        <p:txBody>
+          <a:bodyPr wrap="square" lIns="0" rIns="0" tIns="0" bIns="0" anchor="t">
+            <a:spAutoFit/>
+          </a:bodyPr>
+          <a:lstStyle/>
+          <a:p>
+            <a:pPr algn="l">
+              <a:lnSpc>
+                <a:spcPct val="100000"/>
+              </a:lnSpc>
+            </a:pPr>
+            <a:r>
+              <a:rPr sz="930" b="0">
+                <a:solidFill>
+                  <a:srgbClr val="5B637A"/>
+                </a:solidFill>
+                <a:latin typeface="Calibri"/>
+              </a:rPr>
+              <a:t>Send to ChatGPT or Gemini</a:t>
+            </a:r>
+          </a:p>
+        </p:txBody>
+      </p:sp>
+      <p:sp>
+        <p:nvSpPr>
+          <p:cNvPr id="37" name="Rounded Rectangle 36"/>
           <p:cNvSpPr/>
           <p:nvPr/>
         </p:nvSpPr>
         <p:spPr>
           <a:xfrm>
-            <a:off x="9034272" y="2331720"/>
+            <a:off x="7635240" y="4023360"/>
             <a:ext cx="2651760" cy="1417320"/>
           </a:xfrm>
           <a:prstGeom prst="roundRect">
@@ -11427,13 +11922,13 @@
       </p:sp>
       <p:sp>
         <p:nvSpPr>
-          <p:cNvPr id="26" name="Rounded Rectangle 25"/>
+          <p:cNvPr id="38" name="Rounded Rectangle 37"/>
           <p:cNvSpPr/>
           <p:nvPr/>
         </p:nvSpPr>
         <p:spPr>
           <a:xfrm>
-            <a:off x="9290303" y="2569463"/>
+            <a:off x="7891271" y="4261104"/>
             <a:ext cx="457200" cy="457200"/>
           </a:xfrm>
           <a:prstGeom prst="roundRect">
@@ -11473,13 +11968,13 @@
       </p:sp>
       <p:sp>
         <p:nvSpPr>
-          <p:cNvPr id="27" name="TextBox 26"/>
-          <p:cNvSpPr txBox="1"/>
-          <p:nvPr/>
-        </p:nvSpPr>
-        <p:spPr>
-          <a:xfrm>
-            <a:off x="9290303" y="2569463"/>
+          <p:cNvPr id="39" name="TextBox 38"/>
+          <p:cNvSpPr txBox="1"/>
+          <p:nvPr/>
+        </p:nvSpPr>
+        <p:spPr>
+          <a:xfrm>
+            <a:off x="7891271" y="4261104"/>
             <a:ext cx="457200" cy="457200"/>
           </a:xfrm>
           <a:prstGeom prst="rect">
@@ -11505,20 +12000,20 @@
                 </a:solidFill>
                 <a:latin typeface="Calibri"/>
               </a:rPr>
-              <a:t>4</a:t>
-            </a:r>
-          </a:p>
-        </p:txBody>
-      </p:sp>
-      <p:sp>
-        <p:nvSpPr>
-          <p:cNvPr id="28" name="TextBox 27"/>
-          <p:cNvSpPr txBox="1"/>
-          <p:nvPr/>
-        </p:nvSpPr>
-        <p:spPr>
-          <a:xfrm>
-            <a:off x="9290303" y="3136391"/>
+              <a:t>7</a:t>
+            </a:r>
+          </a:p>
+        </p:txBody>
+      </p:sp>
+      <p:sp>
+        <p:nvSpPr>
+          <p:cNvPr id="40" name="TextBox 39"/>
+          <p:cNvSpPr txBox="1"/>
+          <p:nvPr/>
+        </p:nvSpPr>
+        <p:spPr>
+          <a:xfrm>
+            <a:off x="7891271" y="4828032"/>
             <a:ext cx="2194560" cy="274320"/>
           </a:xfrm>
           <a:prstGeom prst="rect">
@@ -11544,20 +12039,20 @@
                 </a:solidFill>
                 <a:latin typeface="Calibri"/>
               </a:rPr>
-              <a:t>Adjust settings</a:t>
-            </a:r>
-          </a:p>
-        </p:txBody>
-      </p:sp>
-      <p:sp>
-        <p:nvSpPr>
-          <p:cNvPr id="29" name="TextBox 28"/>
-          <p:cNvSpPr txBox="1"/>
-          <p:nvPr/>
-        </p:nvSpPr>
-        <p:spPr>
-          <a:xfrm>
-            <a:off x="9290303" y="3410711"/>
+              <a:t>Save &amp; organize</a:t>
+            </a:r>
+          </a:p>
+        </p:txBody>
+      </p:sp>
+      <p:sp>
+        <p:nvSpPr>
+          <p:cNvPr id="41" name="TextBox 40"/>
+          <p:cNvSpPr txBox="1"/>
+          <p:nvPr/>
+        </p:nvSpPr>
+        <p:spPr>
+          <a:xfrm>
+            <a:off x="7891271" y="5102352"/>
             <a:ext cx="2194560" cy="320040"/>
           </a:xfrm>
           <a:prstGeom prst="rect">
@@ -11583,72 +12078,24 @@
                 </a:solidFill>
                 <a:latin typeface="Calibri"/>
               </a:rPr>
-              <a:t>Position, ratio, theme, description</a:t>
-            </a:r>
-          </a:p>
-        </p:txBody>
-      </p:sp>
-      <p:sp>
-        <p:nvSpPr>
-          <p:cNvPr id="30" name="Rounded Rectangle 29"/>
+              <a:t>Heart favorites, browse the library</a:t>
+            </a:r>
+          </a:p>
+        </p:txBody>
+      </p:sp>
+      <p:sp>
+        <p:nvSpPr>
+          <p:cNvPr id="42" name="Chevron 41"/>
           <p:cNvSpPr/>
           <p:nvPr/>
         </p:nvSpPr>
         <p:spPr>
           <a:xfrm>
-            <a:off x="2039112" y="4023360"/>
-            <a:ext cx="2651760" cy="1417320"/>
-          </a:xfrm>
-          <a:prstGeom prst="roundRect">
-            <a:avLst>
-              <a:gd name="adj" fmla="val 6000"/>
-            </a:avLst>
-          </a:prstGeom>
-          <a:solidFill>
-            <a:srgbClr val="FFFFFF"/>
-          </a:solidFill>
-          <a:ln>
-            <a:noFill/>
-          </a:ln>
-          <a:effectLst/>
-        </p:spPr>
-        <p:style>
-          <a:lnRef idx="1">
-            <a:schemeClr val="accent1"/>
-          </a:lnRef>
-          <a:fillRef idx="3">
-            <a:schemeClr val="accent1"/>
-          </a:fillRef>
-          <a:effectRef idx="2">
-            <a:schemeClr val="accent1"/>
-          </a:effectRef>
-          <a:fontRef idx="minor">
-            <a:schemeClr val="lt1"/>
-          </a:fontRef>
-        </p:style>
-        <p:txBody>
-          <a:bodyPr rtlCol="0" anchor="ctr"/>
-          <a:lstStyle/>
-          <a:p>
-            <a:pPr algn="ctr"/>
-          </a:p>
-        </p:txBody>
-      </p:sp>
-      <p:sp>
-        <p:nvSpPr>
-          <p:cNvPr id="31" name="Rounded Rectangle 30"/>
-          <p:cNvSpPr/>
-          <p:nvPr/>
-        </p:nvSpPr>
-        <p:spPr>
-          <a:xfrm>
-            <a:off x="2295144" y="4261104"/>
-            <a:ext cx="457200" cy="457200"/>
-          </a:xfrm>
-          <a:prstGeom prst="roundRect">
-            <a:avLst>
-              <a:gd name="adj" fmla="val 20000"/>
-            </a:avLst>
+            <a:off x="3291839" y="2926080"/>
+            <a:ext cx="146304" cy="237744"/>
+          </a:xfrm>
+          <a:prstGeom prst="chevron">
+            <a:avLst/>
           </a:prstGeom>
           <a:solidFill>
             <a:srgbClr val="16175A"/>
@@ -11682,133 +12129,16 @@
       </p:sp>
       <p:sp>
         <p:nvSpPr>
-          <p:cNvPr id="32" name="TextBox 31"/>
-          <p:cNvSpPr txBox="1"/>
-          <p:nvPr/>
-        </p:nvSpPr>
-        <p:spPr>
-          <a:xfrm>
-            <a:off x="2295144" y="4261104"/>
-            <a:ext cx="457200" cy="457200"/>
-          </a:xfrm>
-          <a:prstGeom prst="rect">
-            <a:avLst/>
-          </a:prstGeom>
-          <a:noFill/>
-        </p:spPr>
-        <p:txBody>
-          <a:bodyPr wrap="square" lIns="0" rIns="0" tIns="0" bIns="0" anchor="ctr">
-            <a:spAutoFit/>
-          </a:bodyPr>
-          <a:lstStyle/>
-          <a:p>
-            <a:pPr algn="ctr">
-              <a:lnSpc>
-                <a:spcPct val="100000"/>
-              </a:lnSpc>
-            </a:pPr>
-            <a:r>
-              <a:rPr sz="1600" b="1">
-                <a:solidFill>
-                  <a:srgbClr val="FFFFFF"/>
-                </a:solidFill>
-                <a:latin typeface="Calibri"/>
-              </a:rPr>
-              <a:t>5</a:t>
-            </a:r>
-          </a:p>
-        </p:txBody>
-      </p:sp>
-      <p:sp>
-        <p:nvSpPr>
-          <p:cNvPr id="33" name="TextBox 32"/>
-          <p:cNvSpPr txBox="1"/>
-          <p:nvPr/>
-        </p:nvSpPr>
-        <p:spPr>
-          <a:xfrm>
-            <a:off x="2295144" y="4828032"/>
-            <a:ext cx="2194560" cy="274320"/>
-          </a:xfrm>
-          <a:prstGeom prst="rect">
-            <a:avLst/>
-          </a:prstGeom>
-          <a:noFill/>
-        </p:spPr>
-        <p:txBody>
-          <a:bodyPr wrap="square" lIns="0" rIns="0" tIns="0" bIns="0" anchor="t">
-            <a:spAutoFit/>
-          </a:bodyPr>
-          <a:lstStyle/>
-          <a:p>
-            <a:pPr algn="l">
-              <a:lnSpc>
-                <a:spcPct val="100000"/>
-              </a:lnSpc>
-            </a:pPr>
-            <a:r>
-              <a:rPr sz="1300" b="1">
-                <a:solidFill>
-                  <a:srgbClr val="1B2A33"/>
-                </a:solidFill>
-                <a:latin typeface="Calibri"/>
-              </a:rPr>
-              <a:t>Regenerate</a:t>
-            </a:r>
-          </a:p>
-        </p:txBody>
-      </p:sp>
-      <p:sp>
-        <p:nvSpPr>
-          <p:cNvPr id="34" name="TextBox 33"/>
-          <p:cNvSpPr txBox="1"/>
-          <p:nvPr/>
-        </p:nvSpPr>
-        <p:spPr>
-          <a:xfrm>
-            <a:off x="2295144" y="5102352"/>
-            <a:ext cx="2194560" cy="320040"/>
-          </a:xfrm>
-          <a:prstGeom prst="rect">
-            <a:avLst/>
-          </a:prstGeom>
-          <a:noFill/>
-        </p:spPr>
-        <p:txBody>
-          <a:bodyPr wrap="square" lIns="0" rIns="0" tIns="0" bIns="0" anchor="t">
-            <a:spAutoFit/>
-          </a:bodyPr>
-          <a:lstStyle/>
-          <a:p>
-            <a:pPr algn="l">
-              <a:lnSpc>
-                <a:spcPct val="100000"/>
-              </a:lnSpc>
-            </a:pPr>
-            <a:r>
-              <a:rPr sz="930" b="0">
-                <a:solidFill>
-                  <a:srgbClr val="5B637A"/>
-                </a:solidFill>
-                <a:latin typeface="Calibri"/>
-              </a:rPr>
-              <a:t>OpenAI writes a fresh on-brand prompt</a:t>
-            </a:r>
-          </a:p>
-        </p:txBody>
-      </p:sp>
-      <p:sp>
-        <p:nvSpPr>
-          <p:cNvPr id="35" name="Rectangle 34"/>
+          <p:cNvPr id="43" name="Chevron 42"/>
           <p:cNvSpPr/>
           <p:nvPr/>
         </p:nvSpPr>
         <p:spPr>
           <a:xfrm>
-            <a:off x="4681728" y="4636008"/>
-            <a:ext cx="164592" cy="201168"/>
-          </a:xfrm>
-          <a:prstGeom prst="rect">
+            <a:off x="6089904" y="2926080"/>
+            <a:ext cx="146304" cy="237744"/>
+          </a:xfrm>
+          <a:prstGeom prst="chevron">
             <a:avLst/>
           </a:prstGeom>
           <a:solidFill>
@@ -11843,65 +12173,17 @@
       </p:sp>
       <p:sp>
         <p:nvSpPr>
-          <p:cNvPr id="36" name="Rounded Rectangle 35"/>
+          <p:cNvPr id="44" name="Chevron 43"/>
           <p:cNvSpPr/>
           <p:nvPr/>
         </p:nvSpPr>
         <p:spPr>
           <a:xfrm>
-            <a:off x="4837176" y="4023360"/>
-            <a:ext cx="2651760" cy="1417320"/>
-          </a:xfrm>
-          <a:prstGeom prst="roundRect">
-            <a:avLst>
-              <a:gd name="adj" fmla="val 6000"/>
-            </a:avLst>
-          </a:prstGeom>
-          <a:solidFill>
-            <a:srgbClr val="FFFFFF"/>
-          </a:solidFill>
-          <a:ln>
-            <a:noFill/>
-          </a:ln>
-          <a:effectLst/>
-        </p:spPr>
-        <p:style>
-          <a:lnRef idx="1">
-            <a:schemeClr val="accent1"/>
-          </a:lnRef>
-          <a:fillRef idx="3">
-            <a:schemeClr val="accent1"/>
-          </a:fillRef>
-          <a:effectRef idx="2">
-            <a:schemeClr val="accent1"/>
-          </a:effectRef>
-          <a:fontRef idx="minor">
-            <a:schemeClr val="lt1"/>
-          </a:fontRef>
-        </p:style>
-        <p:txBody>
-          <a:bodyPr rtlCol="0" anchor="ctr"/>
-          <a:lstStyle/>
-          <a:p>
-            <a:pPr algn="ctr"/>
-          </a:p>
-        </p:txBody>
-      </p:sp>
-      <p:sp>
-        <p:nvSpPr>
-          <p:cNvPr id="37" name="Rounded Rectangle 36"/>
-          <p:cNvSpPr/>
-          <p:nvPr/>
-        </p:nvSpPr>
-        <p:spPr>
-          <a:xfrm>
-            <a:off x="5093208" y="4261104"/>
-            <a:ext cx="457200" cy="457200"/>
-          </a:xfrm>
-          <a:prstGeom prst="roundRect">
-            <a:avLst>
-              <a:gd name="adj" fmla="val 20000"/>
-            </a:avLst>
+            <a:off x="8887968" y="2926080"/>
+            <a:ext cx="146304" cy="237744"/>
+          </a:xfrm>
+          <a:prstGeom prst="chevron">
+            <a:avLst/>
           </a:prstGeom>
           <a:solidFill>
             <a:srgbClr val="16175A"/>
@@ -11935,133 +12217,16 @@
       </p:sp>
       <p:sp>
         <p:nvSpPr>
-          <p:cNvPr id="38" name="TextBox 37"/>
-          <p:cNvSpPr txBox="1"/>
-          <p:nvPr/>
-        </p:nvSpPr>
-        <p:spPr>
-          <a:xfrm>
-            <a:off x="5093208" y="4261104"/>
-            <a:ext cx="457200" cy="457200"/>
-          </a:xfrm>
-          <a:prstGeom prst="rect">
-            <a:avLst/>
-          </a:prstGeom>
-          <a:noFill/>
-        </p:spPr>
-        <p:txBody>
-          <a:bodyPr wrap="square" lIns="0" rIns="0" tIns="0" bIns="0" anchor="ctr">
-            <a:spAutoFit/>
-          </a:bodyPr>
-          <a:lstStyle/>
-          <a:p>
-            <a:pPr algn="ctr">
-              <a:lnSpc>
-                <a:spcPct val="100000"/>
-              </a:lnSpc>
-            </a:pPr>
-            <a:r>
-              <a:rPr sz="1600" b="1">
-                <a:solidFill>
-                  <a:srgbClr val="FFFFFF"/>
-                </a:solidFill>
-                <a:latin typeface="Calibri"/>
-              </a:rPr>
-              <a:t>6</a:t>
-            </a:r>
-          </a:p>
-        </p:txBody>
-      </p:sp>
-      <p:sp>
-        <p:nvSpPr>
-          <p:cNvPr id="39" name="TextBox 38"/>
-          <p:cNvSpPr txBox="1"/>
-          <p:nvPr/>
-        </p:nvSpPr>
-        <p:spPr>
-          <a:xfrm>
-            <a:off x="5093208" y="4828032"/>
-            <a:ext cx="2194560" cy="274320"/>
-          </a:xfrm>
-          <a:prstGeom prst="rect">
-            <a:avLst/>
-          </a:prstGeom>
-          <a:noFill/>
-        </p:spPr>
-        <p:txBody>
-          <a:bodyPr wrap="square" lIns="0" rIns="0" tIns="0" bIns="0" anchor="t">
-            <a:spAutoFit/>
-          </a:bodyPr>
-          <a:lstStyle/>
-          <a:p>
-            <a:pPr algn="l">
-              <a:lnSpc>
-                <a:spcPct val="100000"/>
-              </a:lnSpc>
-            </a:pPr>
-            <a:r>
-              <a:rPr sz="1300" b="1">
-                <a:solidFill>
-                  <a:srgbClr val="1B2A33"/>
-                </a:solidFill>
-                <a:latin typeface="Calibri"/>
-              </a:rPr>
-              <a:t>Generate images</a:t>
-            </a:r>
-          </a:p>
-        </p:txBody>
-      </p:sp>
-      <p:sp>
-        <p:nvSpPr>
-          <p:cNvPr id="40" name="TextBox 39"/>
-          <p:cNvSpPr txBox="1"/>
-          <p:nvPr/>
-        </p:nvSpPr>
-        <p:spPr>
-          <a:xfrm>
-            <a:off x="5093208" y="5102352"/>
-            <a:ext cx="2194560" cy="320040"/>
-          </a:xfrm>
-          <a:prstGeom prst="rect">
-            <a:avLst/>
-          </a:prstGeom>
-          <a:noFill/>
-        </p:spPr>
-        <p:txBody>
-          <a:bodyPr wrap="square" lIns="0" rIns="0" tIns="0" bIns="0" anchor="t">
-            <a:spAutoFit/>
-          </a:bodyPr>
-          <a:lstStyle/>
-          <a:p>
-            <a:pPr algn="l">
-              <a:lnSpc>
-                <a:spcPct val="100000"/>
-              </a:lnSpc>
-            </a:pPr>
-            <a:r>
-              <a:rPr sz="930" b="0">
-                <a:solidFill>
-                  <a:srgbClr val="5B637A"/>
-                </a:solidFill>
-                <a:latin typeface="Calibri"/>
-              </a:rPr>
-              <a:t>Send to ChatGPT or Gemini</a:t>
-            </a:r>
-          </a:p>
-        </p:txBody>
-      </p:sp>
-      <p:sp>
-        <p:nvSpPr>
-          <p:cNvPr id="41" name="Rectangle 40"/>
+          <p:cNvPr id="45" name="Chevron 44"/>
           <p:cNvSpPr/>
           <p:nvPr/>
         </p:nvSpPr>
         <p:spPr>
           <a:xfrm>
-            <a:off x="7479792" y="4636008"/>
-            <a:ext cx="164592" cy="201168"/>
-          </a:xfrm>
-          <a:prstGeom prst="rect">
+            <a:off x="4690872" y="4617720"/>
+            <a:ext cx="146304" cy="237744"/>
+          </a:xfrm>
+          <a:prstGeom prst="chevron">
             <a:avLst/>
           </a:prstGeom>
           <a:solidFill>
@@ -12096,65 +12261,17 @@
       </p:sp>
       <p:sp>
         <p:nvSpPr>
-          <p:cNvPr id="42" name="Rounded Rectangle 41"/>
+          <p:cNvPr id="46" name="Chevron 45"/>
           <p:cNvSpPr/>
           <p:nvPr/>
         </p:nvSpPr>
         <p:spPr>
           <a:xfrm>
-            <a:off x="7635240" y="4023360"/>
-            <a:ext cx="2651760" cy="1417320"/>
-          </a:xfrm>
-          <a:prstGeom prst="roundRect">
-            <a:avLst>
-              <a:gd name="adj" fmla="val 6000"/>
-            </a:avLst>
-          </a:prstGeom>
-          <a:solidFill>
-            <a:srgbClr val="FFFFFF"/>
-          </a:solidFill>
-          <a:ln>
-            <a:noFill/>
-          </a:ln>
-          <a:effectLst/>
-        </p:spPr>
-        <p:style>
-          <a:lnRef idx="1">
-            <a:schemeClr val="accent1"/>
-          </a:lnRef>
-          <a:fillRef idx="3">
-            <a:schemeClr val="accent1"/>
-          </a:fillRef>
-          <a:effectRef idx="2">
-            <a:schemeClr val="accent1"/>
-          </a:effectRef>
-          <a:fontRef idx="minor">
-            <a:schemeClr val="lt1"/>
-          </a:fontRef>
-        </p:style>
-        <p:txBody>
-          <a:bodyPr rtlCol="0" anchor="ctr"/>
-          <a:lstStyle/>
-          <a:p>
-            <a:pPr algn="ctr"/>
-          </a:p>
-        </p:txBody>
-      </p:sp>
-      <p:sp>
-        <p:nvSpPr>
-          <p:cNvPr id="43" name="Rounded Rectangle 42"/>
-          <p:cNvSpPr/>
-          <p:nvPr/>
-        </p:nvSpPr>
-        <p:spPr>
-          <a:xfrm>
-            <a:off x="7891271" y="4261104"/>
-            <a:ext cx="457200" cy="457200"/>
-          </a:xfrm>
-          <a:prstGeom prst="roundRect">
-            <a:avLst>
-              <a:gd name="adj" fmla="val 20000"/>
-            </a:avLst>
+            <a:off x="7488936" y="4617720"/>
+            <a:ext cx="146304" cy="237744"/>
+          </a:xfrm>
+          <a:prstGeom prst="chevron">
+            <a:avLst/>
           </a:prstGeom>
           <a:solidFill>
             <a:srgbClr val="16175A"/>
@@ -12183,123 +12300,6 @@
           <a:lstStyle/>
           <a:p>
             <a:pPr algn="ctr"/>
-          </a:p>
-        </p:txBody>
-      </p:sp>
-      <p:sp>
-        <p:nvSpPr>
-          <p:cNvPr id="44" name="TextBox 43"/>
-          <p:cNvSpPr txBox="1"/>
-          <p:nvPr/>
-        </p:nvSpPr>
-        <p:spPr>
-          <a:xfrm>
-            <a:off x="7891271" y="4261104"/>
-            <a:ext cx="457200" cy="457200"/>
-          </a:xfrm>
-          <a:prstGeom prst="rect">
-            <a:avLst/>
-          </a:prstGeom>
-          <a:noFill/>
-        </p:spPr>
-        <p:txBody>
-          <a:bodyPr wrap="square" lIns="0" rIns="0" tIns="0" bIns="0" anchor="ctr">
-            <a:spAutoFit/>
-          </a:bodyPr>
-          <a:lstStyle/>
-          <a:p>
-            <a:pPr algn="ctr">
-              <a:lnSpc>
-                <a:spcPct val="100000"/>
-              </a:lnSpc>
-            </a:pPr>
-            <a:r>
-              <a:rPr sz="1600" b="1">
-                <a:solidFill>
-                  <a:srgbClr val="FFFFFF"/>
-                </a:solidFill>
-                <a:latin typeface="Calibri"/>
-              </a:rPr>
-              <a:t>7</a:t>
-            </a:r>
-          </a:p>
-        </p:txBody>
-      </p:sp>
-      <p:sp>
-        <p:nvSpPr>
-          <p:cNvPr id="45" name="TextBox 44"/>
-          <p:cNvSpPr txBox="1"/>
-          <p:nvPr/>
-        </p:nvSpPr>
-        <p:spPr>
-          <a:xfrm>
-            <a:off x="7891271" y="4828032"/>
-            <a:ext cx="2194560" cy="274320"/>
-          </a:xfrm>
-          <a:prstGeom prst="rect">
-            <a:avLst/>
-          </a:prstGeom>
-          <a:noFill/>
-        </p:spPr>
-        <p:txBody>
-          <a:bodyPr wrap="square" lIns="0" rIns="0" tIns="0" bIns="0" anchor="t">
-            <a:spAutoFit/>
-          </a:bodyPr>
-          <a:lstStyle/>
-          <a:p>
-            <a:pPr algn="l">
-              <a:lnSpc>
-                <a:spcPct val="100000"/>
-              </a:lnSpc>
-            </a:pPr>
-            <a:r>
-              <a:rPr sz="1300" b="1">
-                <a:solidFill>
-                  <a:srgbClr val="1B2A33"/>
-                </a:solidFill>
-                <a:latin typeface="Calibri"/>
-              </a:rPr>
-              <a:t>Save &amp; organize</a:t>
-            </a:r>
-          </a:p>
-        </p:txBody>
-      </p:sp>
-      <p:sp>
-        <p:nvSpPr>
-          <p:cNvPr id="46" name="TextBox 45"/>
-          <p:cNvSpPr txBox="1"/>
-          <p:nvPr/>
-        </p:nvSpPr>
-        <p:spPr>
-          <a:xfrm>
-            <a:off x="7891271" y="5102352"/>
-            <a:ext cx="2194560" cy="320040"/>
-          </a:xfrm>
-          <a:prstGeom prst="rect">
-            <a:avLst/>
-          </a:prstGeom>
-          <a:noFill/>
-        </p:spPr>
-        <p:txBody>
-          <a:bodyPr wrap="square" lIns="0" rIns="0" tIns="0" bIns="0" anchor="t">
-            <a:spAutoFit/>
-          </a:bodyPr>
-          <a:lstStyle/>
-          <a:p>
-            <a:pPr algn="l">
-              <a:lnSpc>
-                <a:spcPct val="100000"/>
-              </a:lnSpc>
-            </a:pPr>
-            <a:r>
-              <a:rPr sz="930" b="0">
-                <a:solidFill>
-                  <a:srgbClr val="5B637A"/>
-                </a:solidFill>
-                <a:latin typeface="Calibri"/>
-              </a:rPr>
-              <a:t>Heart favorites, browse the library</a:t>
-            </a:r>
           </a:p>
         </p:txBody>
       </p:sp>

--- a/PromptGenerator_Overview.pptx
+++ b/PromptGenerator_Overview.pptx
@@ -4771,8 +4771,8 @@
         </p:nvSpPr>
         <p:spPr>
           <a:xfrm>
-            <a:off x="4672584" y="2066544"/>
-            <a:ext cx="6793992" cy="3976497"/>
+            <a:off x="5724144" y="2039112"/>
+            <a:ext cx="4953407" cy="4389120"/>
           </a:xfrm>
           <a:prstGeom prst="roundRect">
             <a:avLst>
@@ -4825,8 +4825,8 @@
         </p:blipFill>
         <p:spPr>
           <a:xfrm>
-            <a:off x="4754880" y="2148840"/>
-            <a:ext cx="6629400" cy="3811905"/>
+            <a:off x="5806440" y="2121408"/>
+            <a:ext cx="4788815" cy="4224528"/>
           </a:xfrm>
           <a:prstGeom prst="rect">
             <a:avLst/>
